--- a/assets/one-pager-template.pptx
+++ b/assets/one-pager-template.pptx
@@ -933,7 +933,7 @@
                 <a:ea typeface="Calibri" pitchFamily="34" charset="-122"/>
                 <a:cs typeface="Calibri" pitchFamily="34" charset="-120"/>
               </a:rPr>
-              <a:t>[НАЗВАНИЕ ПРОЕКТА]</a:t>
+              <a:t>[PROJECT NAME]</a:t>
             </a:r>
             <a:endParaRPr lang="en-US" sz="2000" dirty="0"/>
           </a:p>
@@ -972,7 +972,7 @@
                 <a:ea typeface="Calibri" pitchFamily="34" charset="-122"/>
                 <a:cs typeface="Calibri" pitchFamily="34" charset="-120"/>
               </a:rPr>
-              <a:t>[Краткий слоган: суть продукта в одном предложении]</a:t>
+              <a:t>[Short tagline: the product in one sentence]</a:t>
             </a:r>
             <a:endParaRPr lang="en-US" sz="1000" dirty="0"/>
           </a:p>
@@ -1035,7 +1035,7 @@
                   <a:srgbClr val="FFFFFF"/>
                 </a:solidFill>
               </a:rPr>
-              <a:t>[Дата]</a:t>
+              <a:t>[Date]</a:t>
             </a:r>
             <a:endParaRPr lang="en-US" sz="900" dirty="0"/>
           </a:p>
@@ -1128,7 +1128,7 @@
                   <a:srgbClr val="60A5FA"/>
                 </a:solidFill>
               </a:rPr>
-              <a:t>ПРОБЛЕМА</a:t>
+              <a:t>PROBLEM</a:t>
             </a:r>
             <a:endParaRPr lang="en-US" sz="700" dirty="0"/>
           </a:p>
@@ -1167,7 +1167,7 @@
                 <a:ea typeface="Calibri" pitchFamily="34" charset="-122"/>
                 <a:cs typeface="Calibri" pitchFamily="34" charset="-120"/>
               </a:rPr>
-              <a:t>[Опишите боль потребителя в 1–2 предложениях. Opportunity Score: XX]</a:t>
+              <a:t>[Describe the customer's pain in 1-2 sentences. Opportunity Score: XX]</a:t>
             </a:r>
             <a:endParaRPr lang="en-US" sz="1000" dirty="0"/>
           </a:p>
@@ -1260,7 +1260,7 @@
                   <a:srgbClr val="60A5FA"/>
                 </a:solidFill>
               </a:rPr>
-              <a:t>РЕШЕНИЕ</a:t>
+              <a:t>SOLUTION</a:t>
             </a:r>
             <a:endParaRPr lang="en-US" sz="700" dirty="0"/>
           </a:p>
@@ -1296,7 +1296,7 @@
                   <a:srgbClr val="60A5FA"/>
                 </a:solidFill>
               </a:rPr>
-              <a:t>ЦП:</a:t>
+              <a:t>Value prop:</a:t>
             </a:r>
             <a:endParaRPr lang="en-US" sz="700" dirty="0"/>
           </a:p>
@@ -1335,7 +1335,7 @@
                 <a:ea typeface="Calibri" pitchFamily="34" charset="-122"/>
                 <a:cs typeface="Calibri" pitchFamily="34" charset="-120"/>
               </a:rPr>
-              <a:t>[Мы помогаем [кому] [что], в отличие от [конкурент], потому что [механизм]]</a:t>
+              <a:t>[We help [whom] [do what], unlike [competitor], because [mechanism]]</a:t>
             </a:r>
             <a:endParaRPr lang="en-US" sz="800" dirty="0"/>
           </a:p>
@@ -1374,7 +1374,7 @@
                 <a:ea typeface="Calibri" pitchFamily="34" charset="-122"/>
                 <a:cs typeface="Calibri" pitchFamily="34" charset="-120"/>
               </a:rPr>
-              <a:t>[Ключевые 2–3 фичи / механизм]</a:t>
+              <a:t>[The key 2-3 features / mechanism]</a:t>
             </a:r>
             <a:endParaRPr lang="en-US" sz="1000" dirty="0"/>
           </a:p>
@@ -1442,7 +1442,7 @@
                   <a:srgbClr val="60A5FA"/>
                 </a:solidFill>
               </a:rPr>
-              <a:t>РЫНОК</a:t>
+              <a:t>MARKET</a:t>
             </a:r>
             <a:endParaRPr lang="en-US" sz="700" dirty="0"/>
           </a:p>
@@ -1478,7 +1478,7 @@
                   <a:srgbClr val="60A5FA"/>
                 </a:solidFill>
               </a:rPr>
-              <a:t>Тип:</a:t>
+              <a:t>Type:</a:t>
             </a:r>
             <a:endParaRPr lang="en-US" sz="700" dirty="0"/>
           </a:p>
@@ -1517,7 +1517,7 @@
                 <a:ea typeface="Calibri" pitchFamily="34" charset="-122"/>
                 <a:cs typeface="Calibri" pitchFamily="34" charset="-120"/>
               </a:rPr>
-              <a:t>[существующий / ресегментир. / новый]</a:t>
+              <a:t>[existing / resegmented / new]</a:t>
             </a:r>
             <a:endParaRPr lang="en-US" sz="750" dirty="0"/>
           </a:p>
@@ -1592,7 +1592,7 @@
                 <a:ea typeface="Calibri" pitchFamily="34" charset="-122"/>
                 <a:cs typeface="Calibri" pitchFamily="34" charset="-120"/>
               </a:rPr>
-              <a:t>[X млрд руб.]</a:t>
+              <a:t>[X RUB bn]</a:t>
             </a:r>
             <a:endParaRPr lang="en-US" sz="850" dirty="0"/>
           </a:p>
@@ -1703,7 +1703,7 @@
                 <a:ea typeface="Calibri" pitchFamily="34" charset="-122"/>
                 <a:cs typeface="Calibri" pitchFamily="34" charset="-120"/>
               </a:rPr>
-              <a:t>[Y млрд руб.]</a:t>
+              <a:t>[Y RUB bn]</a:t>
             </a:r>
             <a:endParaRPr lang="en-US" sz="850" dirty="0"/>
           </a:p>
@@ -1814,7 +1814,7 @@
                 <a:ea typeface="Calibri" pitchFamily="34" charset="-122"/>
                 <a:cs typeface="Calibri" pitchFamily="34" charset="-120"/>
               </a:rPr>
-              <a:t>[Z млн руб.]</a:t>
+              <a:t>[Z RUB m]</a:t>
             </a:r>
             <a:endParaRPr lang="en-US" sz="850" dirty="0"/>
           </a:p>
@@ -1918,7 +1918,7 @@
                   <a:srgbClr val="60A5FA"/>
                 </a:solidFill>
               </a:rPr>
-              <a:t>ЮНИТ-ЭКОНОМИКА</a:t>
+              <a:t>UNIT ECONOMICS</a:t>
             </a:r>
             <a:endParaRPr lang="en-US" sz="700" dirty="0"/>
           </a:p>
@@ -1957,7 +1957,7 @@
                 <a:ea typeface="Calibri" pitchFamily="34" charset="-122"/>
                 <a:cs typeface="Calibri" pitchFamily="34" charset="-120"/>
               </a:rPr>
-              <a:t>[X руб.]</a:t>
+              <a:t>[X RUB]</a:t>
             </a:r>
             <a:endParaRPr lang="en-US" sz="1300" dirty="0"/>
           </a:p>
@@ -2032,7 +2032,7 @@
                 <a:ea typeface="Calibri" pitchFamily="34" charset="-122"/>
                 <a:cs typeface="Calibri" pitchFamily="34" charset="-120"/>
               </a:rPr>
-              <a:t>[Y руб.]</a:t>
+              <a:t>[Y RUB]</a:t>
             </a:r>
             <a:endParaRPr lang="en-US" sz="1300" dirty="0"/>
           </a:p>
@@ -2182,7 +2182,7 @@
                 <a:ea typeface="Calibri" pitchFamily="34" charset="-122"/>
                 <a:cs typeface="Calibri" pitchFamily="34" charset="-120"/>
               </a:rPr>
-              <a:t>[N мес.]</a:t>
+              <a:t>[N months]</a:t>
             </a:r>
             <a:endParaRPr lang="en-US" sz="1300" dirty="0"/>
           </a:p>
@@ -2257,7 +2257,7 @@
                 <a:ea typeface="Calibri" pitchFamily="34" charset="-122"/>
                 <a:cs typeface="Calibri" pitchFamily="34" charset="-120"/>
               </a:rPr>
-              <a:t>[N мес.]</a:t>
+              <a:t>[N months]</a:t>
             </a:r>
             <a:endParaRPr lang="en-US" sz="1300" dirty="0"/>
           </a:p>
@@ -2368,7 +2368,7 @@
                   <a:srgbClr val="94A3B8"/>
                 </a:solidFill>
               </a:rPr>
-              <a:t>B/E мес.</a:t>
+              <a:t>B/E month</a:t>
             </a:r>
             <a:endParaRPr lang="en-US" sz="700" dirty="0"/>
           </a:p>
@@ -2436,7 +2436,7 @@
                   <a:srgbClr val="60A5FA"/>
                 </a:solidFill>
               </a:rPr>
-              <a:t>ГЛАВНЫЙ СЦЕНАРИЙ</a:t>
+              <a:t>MAIN SCENARIO</a:t>
             </a:r>
             <a:endParaRPr lang="en-US" sz="700" dirty="0"/>
           </a:p>
@@ -2475,7 +2475,7 @@
                 <a:ea typeface="Calibri" pitchFamily="34" charset="-122"/>
                 <a:cs typeface="Calibri" pitchFamily="34" charset="-120"/>
               </a:rPr>
-              <a:t>[Название сценария]</a:t>
+              <a:t>[Scenario name]</a:t>
             </a:r>
             <a:endParaRPr lang="en-US" sz="1100" dirty="0"/>
           </a:p>
@@ -2511,7 +2511,7 @@
                   <a:srgbClr val="94A3B8"/>
                 </a:solidFill>
               </a:rPr>
-              <a:t>Тип бизнеса:</a:t>
+              <a:t>Business type:</a:t>
             </a:r>
             <a:endParaRPr lang="en-US" sz="850" dirty="0"/>
           </a:p>
@@ -2547,7 +2547,7 @@
                   <a:srgbClr val="E2E8F0"/>
                 </a:solidFill>
               </a:rPr>
-              <a:t>[Продукт / Сервис / Маркетплейс / Hardware]</a:t>
+              <a:t>[Product / Service / Marketplace / Hardware]</a:t>
             </a:r>
             <a:endParaRPr lang="en-US" sz="850" dirty="0"/>
           </a:p>
@@ -2583,7 +2583,7 @@
                   <a:srgbClr val="94A3B8"/>
                 </a:solidFill>
               </a:rPr>
-              <a:t>Монетизация:</a:t>
+              <a:t>Monetisation:</a:t>
             </a:r>
             <a:endParaRPr lang="en-US" sz="850" dirty="0"/>
           </a:p>
@@ -2619,7 +2619,7 @@
                   <a:srgbClr val="E2E8F0"/>
                 </a:solidFill>
               </a:rPr>
-              <a:t>[подписка / комиссия / разовые / take rate]</a:t>
+              <a:t>[subscription / commission / one-off / take rate]</a:t>
             </a:r>
             <a:endParaRPr lang="en-US" sz="850" dirty="0"/>
           </a:p>
@@ -2655,7 +2655,7 @@
                   <a:srgbClr val="94A3B8"/>
                 </a:solidFill>
               </a:rPr>
-              <a:t>Чек / GMV:</a:t>
+              <a:t>Ticket / GMV:</a:t>
             </a:r>
             <a:endParaRPr lang="en-US" sz="850" dirty="0"/>
           </a:p>
@@ -2691,7 +2691,7 @@
                   <a:srgbClr val="E2E8F0"/>
                 </a:solidFill>
               </a:rPr>
-              <a:t>[X руб. | GMV мес.1: Y руб.]</a:t>
+              <a:t>[X RUB | GMV month 1: Y RUB]</a:t>
             </a:r>
             <a:endParaRPr lang="en-US" sz="850" dirty="0"/>
           </a:p>
@@ -2903,7 +2903,7 @@
                   <a:srgbClr val="60A5FA"/>
                 </a:solidFill>
               </a:rPr>
-              <a:t>ТОП-3 ИНСАЙТА ИЗ ИССЛЕДОВАНИЯ</a:t>
+              <a:t>TOP 3 RESEARCH INSIGHTS</a:t>
             </a:r>
             <a:endParaRPr lang="en-US" sz="700" dirty="0"/>
           </a:p>
@@ -3003,7 +3003,7 @@
                 <a:ea typeface="Calibri" pitchFamily="34" charset="-122"/>
                 <a:cs typeface="Calibri" pitchFamily="34" charset="-120"/>
               </a:rPr>
-              <a:t>[Инсайт 1 — паттерн из интервью, OS = XX]</a:t>
+              <a:t>[Insight 1 — a pattern from the interviews, OS = XX]</a:t>
             </a:r>
             <a:endParaRPr lang="en-US" sz="850" dirty="0"/>
           </a:p>
@@ -3103,7 +3103,7 @@
                 <a:ea typeface="Calibri" pitchFamily="34" charset="-122"/>
                 <a:cs typeface="Calibri" pitchFamily="34" charset="-120"/>
               </a:rPr>
-              <a:t>[Инсайт 2 — незакрытая потребность сегмента]</a:t>
+              <a:t>[Insight 2 — an underserved need in the segment]</a:t>
             </a:r>
             <a:endParaRPr lang="en-US" sz="850" dirty="0"/>
           </a:p>
@@ -3203,7 +3203,7 @@
                 <a:ea typeface="Calibri" pitchFamily="34" charset="-122"/>
                 <a:cs typeface="Calibri" pitchFamily="34" charset="-120"/>
               </a:rPr>
-              <a:t>[Инсайт 3 — ключевая боль из Job Map]</a:t>
+              <a:t>[Insight 3 — the key pain from the Job Map]</a:t>
             </a:r>
             <a:endParaRPr lang="en-US" sz="850" dirty="0"/>
           </a:p>
@@ -3271,7 +3271,7 @@
                   <a:srgbClr val="60A5FA"/>
                 </a:solidFill>
               </a:rPr>
-              <a:t>ТОП-3 РИСКОВЫХ ГИПОТЕЗЫ</a:t>
+              <a:t>TOP 3 RISKY HYPOTHESES</a:t>
             </a:r>
             <a:endParaRPr lang="en-US" sz="700" dirty="0"/>
           </a:p>
@@ -3335,7 +3335,7 @@
                 <a:ea typeface="Calibri" pitchFamily="34" charset="-122"/>
                 <a:cs typeface="Calibri" pitchFamily="34" charset="-120"/>
               </a:rPr>
-              <a:t>[Гипотеза 1 — тип: Потребности]</a:t>
+              <a:t>[Hypothesis 1 — type: need]</a:t>
             </a:r>
             <a:endParaRPr lang="en-US" sz="850" dirty="0"/>
           </a:p>
@@ -3371,7 +3371,7 @@
                   <a:srgbClr val="94A3B8"/>
                 </a:solidFill>
               </a:rPr>
-              <a:t>Метод: [метод]  ·  Срок: [N д.]</a:t>
+              <a:t>Method: [method]  ·  Timeframe: [N days]</a:t>
             </a:r>
             <a:endParaRPr lang="en-US" sz="750" dirty="0"/>
           </a:p>
@@ -3435,7 +3435,7 @@
                 <a:ea typeface="Calibri" pitchFamily="34" charset="-122"/>
                 <a:cs typeface="Calibri" pitchFamily="34" charset="-120"/>
               </a:rPr>
-              <a:t>[Гипотеза 2 — тип: Канала]</a:t>
+              <a:t>[Hypothesis 2 — type: channel]</a:t>
             </a:r>
             <a:endParaRPr lang="en-US" sz="850" dirty="0"/>
           </a:p>
@@ -3471,7 +3471,7 @@
                   <a:srgbClr val="94A3B8"/>
                 </a:solidFill>
               </a:rPr>
-              <a:t>Метод: [метод]  ·  Срок: [N д.]</a:t>
+              <a:t>Method: [method]  ·  Timeframe: [N days]</a:t>
             </a:r>
             <a:endParaRPr lang="en-US" sz="750" dirty="0"/>
           </a:p>
@@ -3535,7 +3535,7 @@
                 <a:ea typeface="Calibri" pitchFamily="34" charset="-122"/>
                 <a:cs typeface="Calibri" pitchFamily="34" charset="-120"/>
               </a:rPr>
-              <a:t>[Гипотеза 3 — тип: Ценности]</a:t>
+              <a:t>[Hypothesis 3 — type: value]</a:t>
             </a:r>
             <a:endParaRPr lang="en-US" sz="850" dirty="0"/>
           </a:p>
@@ -3571,7 +3571,7 @@
                   <a:srgbClr val="94A3B8"/>
                 </a:solidFill>
               </a:rPr>
-              <a:t>Метод: [метод]  ·  Срок: [N д.]</a:t>
+              <a:t>Method: [method]  ·  Timeframe: [N days]</a:t>
             </a:r>
             <a:endParaRPr lang="en-US" sz="750" dirty="0"/>
           </a:p>
@@ -3639,7 +3639,7 @@
                   <a:srgbClr val="60A5FA"/>
                 </a:solidFill>
               </a:rPr>
-              <a:t>СЛЕДУЮЩИЙ ШАГ</a:t>
+              <a:t>NEXT STEP</a:t>
             </a:r>
             <a:endParaRPr lang="en-US" sz="700" dirty="0"/>
           </a:p>
@@ -3739,7 +3739,7 @@
                 <a:ea typeface="Calibri" pitchFamily="34" charset="-122"/>
                 <a:cs typeface="Calibri" pitchFamily="34" charset="-120"/>
               </a:rPr>
-              <a:t>[Конкретное действие]</a:t>
+              <a:t>[A concrete action]</a:t>
             </a:r>
             <a:endParaRPr lang="en-US" sz="1000" dirty="0"/>
           </a:p>
@@ -3775,7 +3775,7 @@
                   <a:srgbClr val="94A3B8"/>
                 </a:solidFill>
               </a:rPr>
-              <a:t>[Владелец]  ·  [Срок]</a:t>
+              <a:t>[Owner]  ·  [Deadline]</a:t>
             </a:r>
             <a:endParaRPr lang="en-US" sz="800" dirty="0"/>
           </a:p>
@@ -3872,7 +3872,7 @@
                   <a:srgbClr val="94A3B8"/>
                 </a:solidFill>
               </a:rPr>
-              <a:t>КОНФИДЕНЦИАЛЬНО</a:t>
+              <a:t>CONFIDENTIAL</a:t>
             </a:r>
             <a:endParaRPr lang="en-US" sz="650" dirty="0"/>
           </a:p>
